--- a/In.Plan MEIO process 06-09-2026.pptx
+++ b/In.Plan MEIO process 06-09-2026.pptx
@@ -6473,7 +6473,7 @@
             <a:pPr algn="ctr"/>
             <a:r>
               <a:rPr sz="900"/>
-              <a:t>Спрос и волатильность из DP</a:t>
+              <a:t>Прогноз спроса из DP</a:t>
             </a:r>
           </a:p>
         </p:txBody>
